--- a/cursos/recursos/el-mapa-de-los-finales/10-torre-contra-peon-i.pptx
+++ b/cursos/recursos/el-mapa-de-los-finales/10-torre-contra-peon-i.pptx
@@ -6278,7 +6278,7 @@
                 </a:solidFill>
                 <a:latin typeface="Calibri"/>
               </a:rPr>
-              <a:t>Contá cada posición de la lección antes de mover y comparala con la respuesta del motor.</a:t>
+              <a:t>Cuenta cada posición de la lección antes de mover y compárala con la respuesta del motor.</a:t>
             </a:r>
           </a:p>
           <a:p>
@@ -6349,7 +6349,7 @@
                 </a:solidFill>
                 <a:latin typeface="Calibri"/>
               </a:rPr>
-              <a:t>•  Recorré cada línea principal hasta entender el porqué de cada jugada.</a:t>
+              <a:t>•  Recorre cada línea principal hasta entender el porqué de cada jugada.</a:t>
             </a:r>
           </a:p>
           <a:p>
@@ -6365,7 +6365,7 @@
                 </a:solidFill>
                 <a:latin typeface="Calibri"/>
               </a:rPr>
-              <a:t>•  Practicá primero las posiciones clave, después las demás.</a:t>
+              <a:t>•  Practica primero las posiciones clave, después las demás.</a:t>
             </a:r>
           </a:p>
           <a:p>
@@ -6381,7 +6381,7 @@
                 </a:solidFill>
                 <a:latin typeface="Calibri"/>
               </a:rPr>
-              <a:t>•  Anotá las reglas de cada final con tus palabras.</a:t>
+              <a:t>•  Anota las reglas de cada final con tus palabras.</a:t>
             </a:r>
           </a:p>
         </p:txBody>
